--- a/content/partner/crossroads-partner-brief-nic.pptx
+++ b/content/partner/crossroads-partner-brief-nic.pptx
@@ -813,7 +813,7 @@
           <a:p>
             <a:r>
               <a:rPr lang="en-US" dirty="0"/>
-              <a:t>Frame: the industry average forces couples to choose between broke and boring. Our flat rate isn't a discount — it's a repositioning. Under-2,500 couples are underserved and they are most of the market.</a:t>
+              <a:t>Frame: the industry average forces couples to choose between broke and boring. Our flat rate isn't a discount, it's a repositioning. Under-2,500 couples are underserved and they are most of the market.</a:t>
             </a:r>
             <a:endParaRPr lang="en-US" dirty="0"/>
           </a:p>
@@ -1165,7 +1165,7 @@
           <a:p>
             <a:r>
               <a:rPr lang="en-US" dirty="0"/>
-              <a:t>The point: no gig where Nic is thrown in cold, and no long unpaid 'training period' either — stages 2–5 are working, earning gigs.</a:t>
+              <a:t>The point: no gig where Nic is thrown in cold, and no long unpaid 'training period' either, stages 2–5 are working, earning gigs.</a:t>
             </a:r>
             <a:endParaRPr lang="en-US" dirty="0"/>
           </a:p>
@@ -1253,7 +1253,7 @@
           <a:p>
             <a:r>
               <a:rPr lang="en-US" dirty="0"/>
-              <a:t>Honest status: the booking engine, city pages, and Spotify playlist capture shipped this week. Portal and Crossroads Live are the next two build phases. The pitch: most solo DJs drown in coordination texts — ours is productized.</a:t>
+              <a:t>Honest status: the booking engine, city pages, and Spotify playlist capture shipped this week. Portal and Crossroads Live are the next two build phases. The pitch: most solo DJs drown in coordination texts, ours is productized.</a:t>
             </a:r>
             <a:endParaRPr lang="en-US" dirty="0"/>
           </a:p>
@@ -1341,7 +1341,7 @@
           <a:p>
             <a:r>
               <a:rPr lang="en-US" dirty="0"/>
-              <a:t>The cap is a promise to Nic as much as to couples: no 40-wedding death march. The travel surcharge goes to whoever drives — the business doesn't skim it.</a:t>
+              <a:t>The cap is a promise to Nic as much as to couples: no 40-wedding death march. The travel surcharge goes to whoever drives, the business doesn't skim it.</a:t>
             </a:r>
             <a:endParaRPr lang="en-US" dirty="0"/>
           </a:p>
@@ -1429,7 +1429,7 @@
           <a:p>
             <a:r>
               <a:rPr lang="en-US" dirty="0"/>
-              <a:t>Close on partnership, not employment: Nic graduating the apprenticeship IS the proof the model transfers — the first data point that this becomes a franchise.</a:t>
+              <a:t>Close on partnership, not employment: Nic graduating the apprenticeship IS the proof the model transfers, the first data point that this becomes a franchise.</a:t>
             </a:r>
             <a:endParaRPr lang="en-US" dirty="0"/>
           </a:p>
@@ -1913,7 +1913,7 @@
                 <a:ea typeface="Calibri" pitchFamily="34" charset="-122"/>
                 <a:cs typeface="Calibri" pitchFamily="34" charset="-120"/>
               </a:rPr>
-              <a:t>The wedding industry sells $2,500+ packages built to upsell. We sell one honest number — and that difference is the whole business.</a:t>
+              <a:t>The wedding industry sells $2,500+ packages built to upsell. We sell one honest number, and that difference is the whole business.</a:t>
             </a:r>
             <a:endParaRPr lang="en-US" sz="1600" dirty="0"/>
           </a:p>
@@ -2811,7 +2811,7 @@
                 <a:ea typeface="Calibri" pitchFamily="34" charset="-122"/>
                 <a:cs typeface="Calibri" pitchFamily="34" charset="-120"/>
               </a:rPr>
-              <a:t>Live acoustic sets for ceremony or cocktail hour. Flat $400 add-on — and 75% of it is yours.</a:t>
+              <a:t>Live acoustic sets for ceremony or cocktail hour. Flat $400 add-on, and 75% of it is yours.</a:t>
             </a:r>
             <a:endParaRPr lang="en-US" sz="1350" dirty="0"/>
           </a:p>
@@ -2960,7 +2960,7 @@
                 <a:ea typeface="Calibri" pitchFamily="34" charset="-122"/>
                 <a:cs typeface="Calibri" pitchFamily="34" charset="-120"/>
               </a:rPr>
-              <a:t>per month, flat — starting January 1, 2027</a:t>
+              <a:t>per month, flat, starting January 1, 2027</a:t>
             </a:r>
             <a:endParaRPr lang="en-US" sz="1600" dirty="0"/>
           </a:p>
@@ -2999,7 +2999,7 @@
                 <a:ea typeface="Calibri" pitchFamily="34" charset="-122"/>
                 <a:cs typeface="Calibri" pitchFamily="34" charset="-120"/>
               </a:rPr>
-              <a:t>$24,000 annualized base. The same number lands in January as in June — the opposite of hospitality hours.</a:t>
+              <a:t>$24,000 annualized base. The same number lands in January as in June, the opposite of hospitality hours.</a:t>
             </a:r>
             <a:endParaRPr lang="en-US" sz="1400" dirty="0"/>
           </a:p>
@@ -3060,7 +3060,7 @@
                 <a:ea typeface="Calibri" pitchFamily="34" charset="-122"/>
                 <a:cs typeface="Calibri" pitchFamily="34" charset="-120"/>
               </a:rPr>
-              <a:t>Not a salary cap — a floor. </a:t>
+              <a:t>Not a salary cap. A floor. </a:t>
             </a:r>
             <a:pPr indent="0" marL="0">
               <a:buNone/>
@@ -3649,7 +3649,7 @@
                 <a:ea typeface="Calibri" pitchFamily="34" charset="-122"/>
                 <a:cs typeface="Calibri" pitchFamily="34" charset="-120"/>
               </a:rPr>
-              <a:t>Earned splits + tips − draws paid = your true-up. Surplus pays out; the draw never claws back a slow quarter.</a:t>
+              <a:t>Earned splits + tips − draws paid = your true-up. Surplus pays out, and the draw never claws back a slow quarter.</a:t>
             </a:r>
             <a:endParaRPr lang="en-US" sz="1150" dirty="0"/>
           </a:p>
@@ -4147,7 +4147,7 @@
                 <a:ea typeface="Calibri" pitchFamily="34" charset="-122"/>
                 <a:cs typeface="Calibri" pitchFamily="34" charset="-120"/>
               </a:rPr>
-              <a:t>Winter draws are paid from money already collected — stability without borrowing.</a:t>
+              <a:t>Winter draws are paid from money already collected. Stability without borrowing.</a:t>
             </a:r>
             <a:endParaRPr lang="en-US" sz="1250" dirty="0"/>
           </a:p>
@@ -4257,7 +4257,7 @@
                 <a:ea typeface="Calibri" pitchFamily="34" charset="-122"/>
                 <a:cs typeface="Calibri" pitchFamily="34" charset="-120"/>
               </a:rPr>
-              <a:t>A structured ramp — every stage has you doing more of the show with a safety net that shrinks on schedule.</a:t>
+              <a:t>A structured ramp: every stage has you doing more of the show with a safety net that shrinks on schedule.</a:t>
             </a:r>
             <a:endParaRPr lang="en-US" sz="1500" dirty="0"/>
           </a:p>
@@ -4573,7 +4573,7 @@
                 <a:ea typeface="Calibri" pitchFamily="34" charset="-122"/>
                 <a:cs typeface="Calibri" pitchFamily="34" charset="-120"/>
               </a:rPr>
-              <a:t>You run segments — cocktail hour, dinner sets — with the lead on the mic.</a:t>
+              <a:t>You run segments (cocktail hour, dinner sets) with the lead on the mic.</a:t>
             </a:r>
             <a:endParaRPr lang="en-US" sz="1250" dirty="0"/>
           </a:p>
@@ -5188,7 +5188,7 @@
                 <a:ea typeface="Calibri" pitchFamily="34" charset="-122"/>
                 <a:cs typeface="Calibri" pitchFamily="34" charset="-120"/>
               </a:rPr>
-              <a:t>Flat-rate site, date requests, deposits, confirmation emails — live today at crossroadsweddingco.com.</a:t>
+              <a:t>Flat-rate site, date requests, deposits, confirmation emails. Live today at crossroadsweddingco.com.</a:t>
             </a:r>
             <a:endParaRPr lang="en-US" sz="1200" dirty="0"/>
           </a:p>
@@ -5861,7 +5861,7 @@
                 <a:ea typeface="Calibri" pitchFamily="34" charset="-122"/>
                 <a:cs typeface="Calibri" pitchFamily="34" charset="-120"/>
               </a:rPr>
-              <a:t>weddings in 2027 — a hard cap, not a stretch goal</a:t>
+              <a:t>weddings in 2027. A hard cap, not a stretch goal</a:t>
             </a:r>
             <a:endParaRPr lang="en-US" sz="1300" dirty="0"/>
           </a:p>
@@ -6189,7 +6189,7 @@
                 <a:ea typeface="Calibri" pitchFamily="34" charset="-122"/>
                 <a:cs typeface="Calibri" pitchFamily="34" charset="-120"/>
               </a:rPr>
-              <a:t>Travel discipline: two-hour radius around Columbus. Venues past ~60 minutes carry a $100–$150 travel surcharge — paid directly to the talent driving.</a:t>
+              <a:t>Travel discipline: two-hour radius around Columbus. Venues past ~60 minutes carry a $100–$150 travel surcharge, paid directly to the talent driving.</a:t>
             </a:r>
             <a:endParaRPr lang="en-US" sz="1300" dirty="0"/>
           </a:p>
@@ -6299,7 +6299,7 @@
                 <a:ea typeface="Calibri" pitchFamily="34" charset="-122"/>
                 <a:cs typeface="Calibri" pitchFamily="34" charset="-120"/>
               </a:rPr>
-              <a:t>Prove the machine in Columbus. Then hand the same playbook — flat rate, talent-first split, Agency OS — to the next market, and the one after that.</a:t>
+              <a:t>Prove the machine in Columbus. Then hand the same playbook (flat rate, talent-first split, Agency OS) to the next market, and the one after that.</a:t>
             </a:r>
             <a:endParaRPr lang="en-US" sz="1700" dirty="0"/>
           </a:p>
@@ -6587,7 +6587,7 @@
                 <a:ea typeface="Calibri" pitchFamily="34" charset="-122"/>
                 <a:cs typeface="Calibri" pitchFamily="34" charset="-120"/>
               </a:rPr>
-              <a:t>Booking, planning, payouts — the software is the franchise.</a:t>
+              <a:t>Booking, planning, payouts: the software is the franchise.</a:t>
             </a:r>
             <a:endParaRPr lang="en-US" sz="1200" dirty="0"/>
           </a:p>
